--- a/artwork/splash.pptx
+++ b/artwork/splash.pptx
@@ -104,6 +104,11 @@
       </a:defRPr>
     </a:lvl9pPr>
   </p:defaultTextStyle>
+  <p:extLst>
+    <p:ext uri="{EFAFB233-063F-42B5-8137-9DF3F51BA10A}">
+      <p15:sldGuideLst xmlns:p15="http://schemas.microsoft.com/office/powerpoint/2012/main"/>
+    </p:ext>
+  </p:extLst>
 </p:presentation>
 </file>
 
@@ -3365,8 +3370,8 @@
         </p:nvSpPr>
         <p:spPr>
           <a:xfrm>
-            <a:off x="3303476" y="991654"/>
-            <a:ext cx="7338818" cy="2277547"/>
+            <a:off x="3303476" y="574390"/>
+            <a:ext cx="7338818" cy="2908489"/>
           </a:xfrm>
           <a:prstGeom prst="rect">
             <a:avLst/>
@@ -3448,12 +3453,79 @@
                 <a:latin typeface="Helvetica Neue Thin" panose="020B0403020202020204" pitchFamily="34" charset="0"/>
                 <a:ea typeface="Helvetica Neue Thin" panose="020B0403020202020204" pitchFamily="34" charset="0"/>
                 <a:cs typeface="Courier New" panose="02070309020205020404" pitchFamily="49" charset="0"/>
+                <a:hlinkClick r:id="rId3"/>
               </a:rPr>
               <a:t>https://github.com/lkubatko/PICL</a:t>
             </a:r>
-          </a:p>
-          <a:p>
-            <a:endParaRPr lang="en-US" sz="1600" dirty="0"/>
+            <a:endParaRPr lang="en-US" sz="1400" dirty="0">
+              <a:latin typeface="Helvetica Neue Thin" panose="020B0403020202020204" pitchFamily="34" charset="0"/>
+              <a:ea typeface="Helvetica Neue Thin" panose="020B0403020202020204" pitchFamily="34" charset="0"/>
+              <a:cs typeface="Courier New" panose="02070309020205020404" pitchFamily="49" charset="0"/>
+            </a:endParaRPr>
+          </a:p>
+          <a:p>
+            <a:endParaRPr lang="en-US" sz="1400" dirty="0">
+              <a:latin typeface="Helvetica Neue Thin" panose="020B0403020202020204" pitchFamily="34" charset="0"/>
+              <a:ea typeface="Helvetica Neue Thin" panose="020B0403020202020204" pitchFamily="34" charset="0"/>
+              <a:cs typeface="Courier New" panose="02070309020205020404" pitchFamily="49" charset="0"/>
+            </a:endParaRPr>
+          </a:p>
+          <a:p>
+            <a:r>
+              <a:rPr lang="en-US" sz="1450" dirty="0">
+                <a:latin typeface="Helvetica Neue Thin" panose="020B0403020202020204" pitchFamily="34" charset="0"/>
+                <a:ea typeface="Helvetica Neue Thin" panose="020B0403020202020204" pitchFamily="34" charset="0"/>
+                <a:cs typeface="Courier New" panose="02070309020205020404" pitchFamily="49" charset="0"/>
+              </a:rPr>
+              <a:t>Contributions to PICL algorithms and methodology</a:t>
+            </a:r>
+            <a:r>
+              <a:rPr lang="en-US" sz="1450" dirty="0">
+                <a:latin typeface="Helvetica Neue" panose="02000503000000020004" pitchFamily="2" charset="0"/>
+                <a:ea typeface="Helvetica Neue" panose="02000503000000020004" pitchFamily="2" charset="0"/>
+                <a:cs typeface="Helvetica Neue" panose="02000503000000020004" pitchFamily="2" charset="0"/>
+              </a:rPr>
+              <a:t> by  David Swofford, Julia </a:t>
+            </a:r>
+            <a:r>
+              <a:rPr lang="en-US" sz="1450" dirty="0" err="1">
+                <a:latin typeface="Helvetica Neue" panose="02000503000000020004" pitchFamily="2" charset="0"/>
+                <a:ea typeface="Helvetica Neue" panose="02000503000000020004" pitchFamily="2" charset="0"/>
+                <a:cs typeface="Helvetica Neue" panose="02000503000000020004" pitchFamily="2" charset="0"/>
+              </a:rPr>
+              <a:t>Chifman</a:t>
+            </a:r>
+            <a:r>
+              <a:rPr lang="en-US" sz="1450" dirty="0">
+                <a:latin typeface="Helvetica Neue" panose="02000503000000020004" pitchFamily="2" charset="0"/>
+                <a:ea typeface="Helvetica Neue" panose="02000503000000020004" pitchFamily="2" charset="0"/>
+                <a:cs typeface="Helvetica Neue" panose="02000503000000020004" pitchFamily="2" charset="0"/>
+              </a:rPr>
+              <a:t>,  Shelby Moshier, </a:t>
+            </a:r>
+            <a:r>
+              <a:rPr lang="en-US" sz="1450" dirty="0" err="1">
+                <a:latin typeface="Helvetica Neue" panose="02000503000000020004" pitchFamily="2" charset="0"/>
+                <a:ea typeface="Helvetica Neue" panose="02000503000000020004" pitchFamily="2" charset="0"/>
+                <a:cs typeface="Helvetica Neue" panose="02000503000000020004" pitchFamily="2" charset="0"/>
+              </a:rPr>
+              <a:t>Sungsik</a:t>
+            </a:r>
+            <a:r>
+              <a:rPr lang="en-US" sz="1450" dirty="0">
+                <a:latin typeface="Helvetica Neue" panose="02000503000000020004" pitchFamily="2" charset="0"/>
+                <a:ea typeface="Helvetica Neue" panose="02000503000000020004" pitchFamily="2" charset="0"/>
+                <a:cs typeface="Helvetica Neue" panose="02000503000000020004" pitchFamily="2" charset="0"/>
+              </a:rPr>
+              <a:t> Kong, Jing Peng, Shawn Chen, Emerson Webb, Dhruv Arora</a:t>
+            </a:r>
+          </a:p>
+          <a:p>
+            <a:endParaRPr lang="en-US" sz="1400" dirty="0">
+              <a:latin typeface="Helvetica Neue" panose="02000503000000020004" pitchFamily="2" charset="0"/>
+              <a:ea typeface="Helvetica Neue" panose="02000503000000020004" pitchFamily="2" charset="0"/>
+              <a:cs typeface="Helvetica Neue" panose="02000503000000020004" pitchFamily="2" charset="0"/>
+            </a:endParaRPr>
           </a:p>
           <a:p>
             <a:r>
@@ -3715,6 +3787,85 @@
           <a:p>
             <a:pPr algn="ctr"/>
             <a:endParaRPr lang="en-US"/>
+          </a:p>
+        </p:txBody>
+      </p:sp>
+      <p:sp>
+        <p:nvSpPr>
+          <p:cNvPr id="3" name="TextBox 2">
+            <a:extLst>
+              <a:ext uri="{FF2B5EF4-FFF2-40B4-BE49-F238E27FC236}">
+                <a16:creationId xmlns:a16="http://schemas.microsoft.com/office/drawing/2014/main" id="{FF80E480-48B6-71E0-27ED-DC24C8FBB812}"/>
+              </a:ext>
+            </a:extLst>
+          </p:cNvPr>
+          <p:cNvSpPr txBox="1"/>
+          <p:nvPr/>
+        </p:nvSpPr>
+        <p:spPr>
+          <a:xfrm>
+            <a:off x="1004460" y="2650302"/>
+            <a:ext cx="2131838" cy="646331"/>
+          </a:xfrm>
+          <a:prstGeom prst="rect">
+            <a:avLst/>
+          </a:prstGeom>
+          <a:noFill/>
+        </p:spPr>
+        <p:txBody>
+          <a:bodyPr wrap="square">
+            <a:spAutoFit/>
+          </a:bodyPr>
+          <a:lstStyle/>
+          <a:p>
+            <a:pPr algn="ctr"/>
+            <a:r>
+              <a:rPr lang="en-US" b="0" i="0" u="none" strike="noStrike" dirty="0">
+                <a:solidFill>
+                  <a:schemeClr val="bg1"/>
+                </a:solidFill>
+                <a:effectLst>
+                  <a:outerShdw blurRad="50800" dist="38100" dir="2700000" algn="tl" rotWithShape="0">
+                    <a:prstClr val="black">
+                      <a:alpha val="40000"/>
+                    </a:prstClr>
+                  </a:outerShdw>
+                </a:effectLst>
+                <a:latin typeface="Aptos" panose="020B0004020202020204" pitchFamily="34" charset="0"/>
+              </a:rPr>
+              <a:t>PICL graphic:</a:t>
+            </a:r>
+          </a:p>
+          <a:p>
+            <a:pPr algn="ctr"/>
+            <a:r>
+              <a:rPr lang="en-US" b="0" i="0" u="none" strike="noStrike" dirty="0">
+                <a:solidFill>
+                  <a:schemeClr val="bg1"/>
+                </a:solidFill>
+                <a:effectLst>
+                  <a:outerShdw blurRad="50800" dist="38100" dir="2700000" algn="tl" rotWithShape="0">
+                    <a:prstClr val="black">
+                      <a:alpha val="40000"/>
+                    </a:prstClr>
+                  </a:outerShdw>
+                </a:effectLst>
+                <a:latin typeface="Aptos" panose="020B0004020202020204" pitchFamily="34" charset="0"/>
+              </a:rPr>
+              <a:t>Shelby Moshier</a:t>
+            </a:r>
+            <a:endParaRPr lang="en-US" dirty="0">
+              <a:solidFill>
+                <a:schemeClr val="bg1"/>
+              </a:solidFill>
+              <a:effectLst>
+                <a:outerShdw blurRad="50800" dist="38100" dir="2700000" algn="tl" rotWithShape="0">
+                  <a:prstClr val="black">
+                    <a:alpha val="40000"/>
+                  </a:prstClr>
+                </a:outerShdw>
+              </a:effectLst>
+            </a:endParaRPr>
           </a:p>
         </p:txBody>
       </p:sp>

--- a/artwork/splash.pptx
+++ b/artwork/splash.pptx
@@ -3453,15 +3453,9 @@
                 <a:latin typeface="Helvetica Neue Thin" panose="020B0403020202020204" pitchFamily="34" charset="0"/>
                 <a:ea typeface="Helvetica Neue Thin" panose="020B0403020202020204" pitchFamily="34" charset="0"/>
                 <a:cs typeface="Courier New" panose="02070309020205020404" pitchFamily="49" charset="0"/>
-                <a:hlinkClick r:id="rId3"/>
               </a:rPr>
               <a:t>https://github.com/lkubatko/PICL</a:t>
             </a:r>
-            <a:endParaRPr lang="en-US" sz="1400" dirty="0">
-              <a:latin typeface="Helvetica Neue Thin" panose="020B0403020202020204" pitchFamily="34" charset="0"/>
-              <a:ea typeface="Helvetica Neue Thin" panose="020B0403020202020204" pitchFamily="34" charset="0"/>
-              <a:cs typeface="Courier New" panose="02070309020205020404" pitchFamily="49" charset="0"/>
-            </a:endParaRPr>
           </a:p>
           <a:p>
             <a:endParaRPr lang="en-US" sz="1400" dirty="0">
@@ -3485,7 +3479,7 @@
                 <a:ea typeface="Helvetica Neue" panose="02000503000000020004" pitchFamily="2" charset="0"/>
                 <a:cs typeface="Helvetica Neue" panose="02000503000000020004" pitchFamily="2" charset="0"/>
               </a:rPr>
-              <a:t> by  David Swofford, Julia </a:t>
+              <a:t> by David Swofford, Julia </a:t>
             </a:r>
             <a:r>
               <a:rPr lang="en-US" sz="1450" dirty="0" err="1">
@@ -3529,7 +3523,7 @@
           </a:p>
           <a:p>
             <a:r>
-              <a:rPr lang="en-US" sz="1600" dirty="0">
+              <a:rPr lang="en-US" sz="1450" dirty="0">
                 <a:latin typeface="Helvetica Neue Light" panose="02000403000000020004" pitchFamily="2" charset="0"/>
                 <a:ea typeface="Helvetica Neue Light" panose="02000403000000020004" pitchFamily="2" charset="0"/>
                 <a:cs typeface="Helvetica Neue" panose="02000503000000020004" pitchFamily="2" charset="0"/>
@@ -3537,7 +3531,7 @@
               <a:t>Cross-platform JavaFX graphical interface by </a:t>
             </a:r>
             <a:r>
-              <a:rPr lang="en-US" sz="1600" dirty="0">
+              <a:rPr lang="en-US" sz="1450" dirty="0">
                 <a:latin typeface="Helvetica Neue" panose="02000503000000020004" pitchFamily="2" charset="0"/>
                 <a:ea typeface="Helvetica Neue" panose="02000503000000020004" pitchFamily="2" charset="0"/>
                 <a:cs typeface="Helvetica Neue" panose="02000503000000020004" pitchFamily="2" charset="0"/>
